--- a/docs/Week05_ExceptionHandling.pptx
+++ b/docs/Week05_ExceptionHandling.pptx
@@ -3421,16 +3421,8 @@
           </a:bodyPr>
           <a:lstStyle/>
           <a:p>
-            <a:pPr>
-              <a:defRPr sz="2200" b="1">
-                <a:solidFill>
-                  <a:srgbClr val="065A82"/>
-                </a:solidFill>
-                <a:latin typeface="Georgia"/>
-              </a:defRPr>
-            </a:pPr>
-            <a:r>
-              <a:t>날짜 유효성 검사</a:t>
+            <a:r>
+              <a:t>예제 4: 날짜 계산</a:t>
             </a:r>
           </a:p>
         </p:txBody>
@@ -3500,336 +3492,50 @@
           </a:bodyPr>
           <a:lstStyle/>
           <a:p>
-            <a:pPr algn="l">
-              <a:spcAft>
-                <a:spcPts val="100"/>
-              </a:spcAft>
-              <a:defRPr sz="1100">
-                <a:solidFill>
-                  <a:srgbClr val="E2E8F0"/>
-                </a:solidFill>
-                <a:latin typeface="Consolas"/>
-              </a:defRPr>
-            </a:pPr>
-            <a:r>
-              <a:t>// 유효한 날짜 판정 메서드</a:t>
-            </a:r>
-          </a:p>
-          <a:p>
-            <a:pPr algn="l">
-              <a:spcAft>
-                <a:spcPts val="100"/>
-              </a:spcAft>
-              <a:defRPr sz="1100">
-                <a:solidFill>
-                  <a:srgbClr val="E2E8F0"/>
-                </a:solidFill>
-                <a:latin typeface="Consolas"/>
-              </a:defRPr>
-            </a:pPr>
-            <a:r>
-              <a:t>public static boolean isValidDate(</a:t>
-            </a:r>
-          </a:p>
-          <a:p>
-            <a:pPr algn="l">
-              <a:spcAft>
-                <a:spcPts val="100"/>
-              </a:spcAft>
-              <a:defRPr sz="1100">
-                <a:solidFill>
-                  <a:srgbClr val="E2E8F0"/>
-                </a:solidFill>
-                <a:latin typeface="Consolas"/>
-              </a:defRPr>
-            </a:pPr>
-            <a:r>
-              <a:t>    String dateStr, String pattern) {</a:t>
-            </a:r>
-          </a:p>
-          <a:p>
-            <a:pPr algn="l">
-              <a:spcAft>
-                <a:spcPts val="100"/>
-              </a:spcAft>
-              <a:defRPr sz="1100">
-                <a:solidFill>
-                  <a:srgbClr val="E2E8F0"/>
-                </a:solidFill>
-                <a:latin typeface="Consolas"/>
-              </a:defRPr>
-            </a:pPr>
-            <a:r>
-              <a:t>    try {</a:t>
-            </a:r>
-          </a:p>
-          <a:p>
-            <a:pPr algn="l">
-              <a:spcAft>
-                <a:spcPts val="100"/>
-              </a:spcAft>
-              <a:defRPr sz="1100">
-                <a:solidFill>
-                  <a:srgbClr val="E2E8F0"/>
-                </a:solidFill>
-                <a:latin typeface="Consolas"/>
-              </a:defRPr>
-            </a:pPr>
-            <a:r>
-              <a:t>        DateTimeFormatter formatter =</a:t>
-            </a:r>
-          </a:p>
-          <a:p>
-            <a:pPr algn="l">
-              <a:spcAft>
-                <a:spcPts val="100"/>
-              </a:spcAft>
-              <a:defRPr sz="1100">
-                <a:solidFill>
-                  <a:srgbClr val="E2E8F0"/>
-                </a:solidFill>
-                <a:latin typeface="Consolas"/>
-              </a:defRPr>
-            </a:pPr>
-            <a:r>
-              <a:t>            DateTimeFormatter.ofPattern(pattern);</a:t>
-            </a:r>
-          </a:p>
-          <a:p>
-            <a:pPr algn="l">
-              <a:spcAft>
-                <a:spcPts val="100"/>
-              </a:spcAft>
-              <a:defRPr sz="1100">
-                <a:solidFill>
-                  <a:srgbClr val="E2E8F0"/>
-                </a:solidFill>
-                <a:latin typeface="Consolas"/>
-              </a:defRPr>
-            </a:pPr>
-            <a:r>
-              <a:t>        LocalDate.parse(dateStr, formatter);</a:t>
-            </a:r>
-          </a:p>
-          <a:p>
-            <a:pPr algn="l">
-              <a:spcAft>
-                <a:spcPts val="100"/>
-              </a:spcAft>
-              <a:defRPr sz="1100">
-                <a:solidFill>
-                  <a:srgbClr val="E2E8F0"/>
-                </a:solidFill>
-                <a:latin typeface="Consolas"/>
-              </a:defRPr>
-            </a:pPr>
-            <a:r>
-              <a:t>        return true;</a:t>
-            </a:r>
-          </a:p>
-          <a:p>
-            <a:pPr algn="l">
-              <a:spcAft>
-                <a:spcPts val="100"/>
-              </a:spcAft>
-              <a:defRPr sz="1100">
-                <a:solidFill>
-                  <a:srgbClr val="E2E8F0"/>
-                </a:solidFill>
-                <a:latin typeface="Consolas"/>
-              </a:defRPr>
-            </a:pPr>
-            <a:r>
-              <a:t>    } catch (Exception e) {</a:t>
-            </a:r>
-          </a:p>
-          <a:p>
-            <a:pPr algn="l">
-              <a:spcAft>
-                <a:spcPts val="100"/>
-              </a:spcAft>
-              <a:defRPr sz="1100">
-                <a:solidFill>
-                  <a:srgbClr val="E2E8F0"/>
-                </a:solidFill>
-                <a:latin typeface="Consolas"/>
-              </a:defRPr>
-            </a:pPr>
-            <a:r>
-              <a:t>        // 형식 오류 또는 유효하지 않은 날짜</a:t>
-            </a:r>
-          </a:p>
-          <a:p>
-            <a:pPr algn="l">
-              <a:spcAft>
-                <a:spcPts val="100"/>
-              </a:spcAft>
-              <a:defRPr sz="1100">
-                <a:solidFill>
-                  <a:srgbClr val="E2E8F0"/>
-                </a:solidFill>
-                <a:latin typeface="Consolas"/>
-              </a:defRPr>
-            </a:pPr>
-            <a:r>
-              <a:t>        return false;</a:t>
-            </a:r>
-          </a:p>
-          <a:p>
-            <a:pPr algn="l">
-              <a:spcAft>
-                <a:spcPts val="100"/>
-              </a:spcAft>
-              <a:defRPr sz="1100">
-                <a:solidFill>
-                  <a:srgbClr val="E2E8F0"/>
-                </a:solidFill>
-                <a:latin typeface="Consolas"/>
-              </a:defRPr>
-            </a:pPr>
-            <a:r>
-              <a:t>    }</a:t>
-            </a:r>
-          </a:p>
-          <a:p>
-            <a:pPr algn="l">
-              <a:spcAft>
-                <a:spcPts val="100"/>
-              </a:spcAft>
-              <a:defRPr sz="1100">
-                <a:solidFill>
-                  <a:srgbClr val="E2E8F0"/>
-                </a:solidFill>
-                <a:latin typeface="Consolas"/>
-              </a:defRPr>
-            </a:pPr>
-            <a:r>
-              <a:t>}</a:t>
-            </a:r>
-          </a:p>
-          <a:p>
-            <a:pPr algn="l">
-              <a:spcAft>
-                <a:spcPts val="100"/>
-              </a:spcAft>
-              <a:defRPr sz="1100">
-                <a:solidFill>
-                  <a:srgbClr val="E2E8F0"/>
-                </a:solidFill>
-                <a:latin typeface="Consolas"/>
-              </a:defRPr>
-            </a:pPr>
-          </a:p>
-          <a:p>
-            <a:pPr algn="l">
-              <a:spcAft>
-                <a:spcPts val="100"/>
-              </a:spcAft>
-              <a:defRPr sz="1100">
-                <a:solidFill>
-                  <a:srgbClr val="E2E8F0"/>
-                </a:solidFill>
-                <a:latin typeface="Consolas"/>
-              </a:defRPr>
-            </a:pPr>
-            <a:r>
-              <a:t>// 사용</a:t>
-            </a:r>
-          </a:p>
-          <a:p>
-            <a:pPr algn="l">
-              <a:spcAft>
-                <a:spcPts val="100"/>
-              </a:spcAft>
-              <a:defRPr sz="1100">
-                <a:solidFill>
-                  <a:srgbClr val="E2E8F0"/>
-                </a:solidFill>
-                <a:latin typeface="Consolas"/>
-              </a:defRPr>
-            </a:pPr>
-            <a:r>
-              <a:t>boolean valid1 = isValidDate(</a:t>
-            </a:r>
-          </a:p>
-          <a:p>
-            <a:pPr algn="l">
-              <a:spcAft>
-                <a:spcPts val="100"/>
-              </a:spcAft>
-              <a:defRPr sz="1100">
-                <a:solidFill>
-                  <a:srgbClr val="E2E8F0"/>
-                </a:solidFill>
-                <a:latin typeface="Consolas"/>
-              </a:defRPr>
-            </a:pPr>
-            <a:r>
-              <a:t>    "2026-02-29", "yyyy-MM-dd");  // false</a:t>
-            </a:r>
-          </a:p>
-          <a:p>
-            <a:pPr algn="l">
-              <a:spcAft>
-                <a:spcPts val="100"/>
-              </a:spcAft>
-              <a:defRPr sz="1100">
-                <a:solidFill>
-                  <a:srgbClr val="E2E8F0"/>
-                </a:solidFill>
-                <a:latin typeface="Consolas"/>
-              </a:defRPr>
-            </a:pPr>
-            <a:r>
-              <a:t>boolean valid2 = isValidDate(</a:t>
-            </a:r>
-          </a:p>
-          <a:p>
-            <a:pPr algn="l">
-              <a:spcAft>
-                <a:spcPts val="100"/>
-              </a:spcAft>
-              <a:defRPr sz="1100">
-                <a:solidFill>
-                  <a:srgbClr val="E2E8F0"/>
-                </a:solidFill>
-                <a:latin typeface="Consolas"/>
-              </a:defRPr>
-            </a:pPr>
-            <a:r>
-              <a:t>    "2026-03-25", "yyyy-MM-dd");  // true</a:t>
-            </a:r>
-          </a:p>
-          <a:p>
-            <a:pPr algn="l">
-              <a:spcAft>
-                <a:spcPts val="100"/>
-              </a:spcAft>
-              <a:defRPr sz="1100">
-                <a:solidFill>
-                  <a:srgbClr val="E2E8F0"/>
-                </a:solidFill>
-                <a:latin typeface="Consolas"/>
-              </a:defRPr>
-            </a:pPr>
-            <a:r>
-              <a:t>boolean valid3 = isValidDate(</a:t>
-            </a:r>
-          </a:p>
-          <a:p>
-            <a:pPr algn="l">
-              <a:spcAft>
-                <a:spcPts val="100"/>
-              </a:spcAft>
-              <a:defRPr sz="1100">
-                <a:solidFill>
-                  <a:srgbClr val="E2E8F0"/>
-                </a:solidFill>
-                <a:latin typeface="Consolas"/>
-              </a:defRPr>
-            </a:pPr>
-            <a:r>
-              <a:t>    "2024-02-29", "yyyy-MM-dd");  // true (윤년)</a:t>
+            <a:r>
+              <a:t>LocalDate today = LocalDate.of(2026, 2, 22);</a:t>
+            </a:r>
+          </a:p>
+          <a:p>
+            <a:r>
+              <a:t>LocalDate eventDate = LocalDate.of(2026, 3, 15);</a:t>
+            </a:r>
+          </a:p>
+          <a:p/>
+          <a:p>
+            <a:r>
+              <a:t>LocalDate after10Days = today.plusDays(10);</a:t>
+            </a:r>
+          </a:p>
+          <a:p>
+            <a:r>
+              <a:t>LocalDate after1Month = today.plusMonths(1);</a:t>
+            </a:r>
+          </a:p>
+          <a:p>
+            <a:r>
+              <a:t>long daysBetween = ChronoUnit.DAYS.between(today, after1Month);</a:t>
+            </a:r>
+          </a:p>
+          <a:p>
+            <a:r>
+              <a:t>long daysUntilEvent = ChronoUnit.DAYS.between(today, eventDate);</a:t>
+            </a:r>
+          </a:p>
+          <a:p/>
+          <a:p>
+            <a:r>
+              <a:t>System.out.println(after10Days);</a:t>
+            </a:r>
+          </a:p>
+          <a:p>
+            <a:r>
+              <a:t>System.out.println(after1Month);</a:t>
+            </a:r>
+          </a:p>
+          <a:p>
+            <a:r>
+              <a:t>System.out.println(daysUntilEvent);</a:t>
             </a:r>
           </a:p>
         </p:txBody>
@@ -3856,67 +3562,18 @@
           </a:bodyPr>
           <a:lstStyle/>
           <a:p>
-            <a:pPr algn="l">
-              <a:spcAft>
-                <a:spcPts val="600"/>
-              </a:spcAft>
-              <a:defRPr sz="1300">
-                <a:solidFill>
-                  <a:srgbClr val="475569"/>
-                </a:solidFill>
-                <a:latin typeface="Calibri"/>
-              </a:defRPr>
-            </a:pPr>
-            <a:r>
-              <a:t>parse() 실패 시</a:t>
-            </a:r>
-          </a:p>
-          <a:p>
-            <a:pPr algn="l">
-              <a:spcAft>
-                <a:spcPts val="600"/>
-              </a:spcAft>
-              <a:defRPr sz="1300">
-                <a:solidFill>
-                  <a:srgbClr val="475569"/>
-                </a:solidFill>
-                <a:latin typeface="Calibri"/>
-              </a:defRPr>
-            </a:pPr>
-            <a:r>
-              <a:t>예외 발생</a:t>
-            </a:r>
-          </a:p>
-          <a:p>
-            <a:pPr algn="l">
-              <a:spcAft>
-                <a:spcPts val="600"/>
-              </a:spcAft>
-              <a:defRPr sz="1300">
-                <a:solidFill>
-                  <a:srgbClr val="475569"/>
-                </a:solidFill>
-                <a:latin typeface="Calibri"/>
-              </a:defRPr>
-            </a:pPr>
-            <a:r>
-              <a:t>try-catch로</a:t>
-            </a:r>
-          </a:p>
-          <a:p>
-            <a:pPr algn="l">
-              <a:spcAft>
-                <a:spcPts val="600"/>
-              </a:spcAft>
-              <a:defRPr sz="1300">
-                <a:solidFill>
-                  <a:srgbClr val="475569"/>
-                </a:solidFill>
-                <a:latin typeface="Calibri"/>
-              </a:defRPr>
-            </a:pPr>
-            <a:r>
-              <a:t>유효성 검사</a:t>
+            <a:r>
+              <a:t>plusDays(): 며칠 뒤 날짜</a:t>
+            </a:r>
+          </a:p>
+          <a:p>
+            <a:r>
+              <a:t>plusMonths(): 몇 달 뒤 날짜</a:t>
+            </a:r>
+          </a:p>
+          <a:p>
+            <a:r>
+              <a:t>ChronoUnit.DAYS.between(): 날짜 차이 계산</a:t>
             </a:r>
           </a:p>
         </p:txBody>
@@ -4047,16 +3704,8 @@
           </a:bodyPr>
           <a:lstStyle/>
           <a:p>
-            <a:pPr>
-              <a:defRPr sz="2200" b="1">
-                <a:solidFill>
-                  <a:srgbClr val="065A82"/>
-                </a:solidFill>
-                <a:latin typeface="Georgia"/>
-              </a:defRPr>
-            </a:pPr>
-            <a:r>
-              <a:t>다중 catch 블록과 try-with-resources</a:t>
+            <a:r>
+              <a:t>핵심 패턴 정리</a:t>
             </a:r>
           </a:p>
         </p:txBody>
@@ -4126,272 +3775,28 @@
           </a:bodyPr>
           <a:lstStyle/>
           <a:p>
-            <a:pPr algn="l">
-              <a:spcAft>
-                <a:spcPts val="100"/>
-              </a:spcAft>
-              <a:defRPr sz="1100">
-                <a:solidFill>
-                  <a:srgbClr val="E2E8F0"/>
-                </a:solidFill>
-                <a:latin typeface="Consolas"/>
-              </a:defRPr>
-            </a:pPr>
-            <a:r>
-              <a:t>// 다중 catch (Java 7+)</a:t>
-            </a:r>
-          </a:p>
-          <a:p>
-            <a:pPr algn="l">
-              <a:spcAft>
-                <a:spcPts val="100"/>
-              </a:spcAft>
-              <a:defRPr sz="1100">
-                <a:solidFill>
-                  <a:srgbClr val="E2E8F0"/>
-                </a:solidFill>
-                <a:latin typeface="Consolas"/>
-              </a:defRPr>
-            </a:pPr>
-            <a:r>
-              <a:t>try {</a:t>
-            </a:r>
-          </a:p>
-          <a:p>
-            <a:pPr algn="l">
-              <a:spcAft>
-                <a:spcPts val="100"/>
-              </a:spcAft>
-              <a:defRPr sz="1100">
-                <a:solidFill>
-                  <a:srgbClr val="E2E8F0"/>
-                </a:solidFill>
-                <a:latin typeface="Consolas"/>
-              </a:defRPr>
-            </a:pPr>
-            <a:r>
-              <a:t>    // 코드</a:t>
-            </a:r>
-          </a:p>
-          <a:p>
-            <a:pPr algn="l">
-              <a:spcAft>
-                <a:spcPts val="100"/>
-              </a:spcAft>
-              <a:defRPr sz="1100">
-                <a:solidFill>
-                  <a:srgbClr val="E2E8F0"/>
-                </a:solidFill>
-                <a:latin typeface="Consolas"/>
-              </a:defRPr>
-            </a:pPr>
-            <a:r>
-              <a:t>} catch (FileNotFoundException | IOException e) {</a:t>
-            </a:r>
-          </a:p>
-          <a:p>
-            <a:pPr algn="l">
-              <a:spcAft>
-                <a:spcPts val="100"/>
-              </a:spcAft>
-              <a:defRPr sz="1100">
-                <a:solidFill>
-                  <a:srgbClr val="E2E8F0"/>
-                </a:solidFill>
-                <a:latin typeface="Consolas"/>
-              </a:defRPr>
-            </a:pPr>
-            <a:r>
-              <a:t>    System.out.println("파일 오류");</a:t>
-            </a:r>
-          </a:p>
-          <a:p>
-            <a:pPr algn="l">
-              <a:spcAft>
-                <a:spcPts val="100"/>
-              </a:spcAft>
-              <a:defRPr sz="1100">
-                <a:solidFill>
-                  <a:srgbClr val="E2E8F0"/>
-                </a:solidFill>
-                <a:latin typeface="Consolas"/>
-              </a:defRPr>
-            </a:pPr>
-            <a:r>
-              <a:t>} catch (NumberFormatException e) {</a:t>
-            </a:r>
-          </a:p>
-          <a:p>
-            <a:pPr algn="l">
-              <a:spcAft>
-                <a:spcPts val="100"/>
-              </a:spcAft>
-              <a:defRPr sz="1100">
-                <a:solidFill>
-                  <a:srgbClr val="E2E8F0"/>
-                </a:solidFill>
-                <a:latin typeface="Consolas"/>
-              </a:defRPr>
-            </a:pPr>
-            <a:r>
-              <a:t>    System.out.println("숫자 형식 오류");</a:t>
-            </a:r>
-          </a:p>
-          <a:p>
-            <a:pPr algn="l">
-              <a:spcAft>
-                <a:spcPts val="100"/>
-              </a:spcAft>
-              <a:defRPr sz="1100">
-                <a:solidFill>
-                  <a:srgbClr val="E2E8F0"/>
-                </a:solidFill>
-                <a:latin typeface="Consolas"/>
-              </a:defRPr>
-            </a:pPr>
-            <a:r>
-              <a:t>}</a:t>
-            </a:r>
-          </a:p>
-          <a:p>
-            <a:pPr algn="l">
-              <a:spcAft>
-                <a:spcPts val="100"/>
-              </a:spcAft>
-              <a:defRPr sz="1100">
-                <a:solidFill>
-                  <a:srgbClr val="E2E8F0"/>
-                </a:solidFill>
-                <a:latin typeface="Consolas"/>
-              </a:defRPr>
-            </a:pPr>
-          </a:p>
-          <a:p>
-            <a:pPr algn="l">
-              <a:spcAft>
-                <a:spcPts val="100"/>
-              </a:spcAft>
-              <a:defRPr sz="1100">
-                <a:solidFill>
-                  <a:srgbClr val="E2E8F0"/>
-                </a:solidFill>
-                <a:latin typeface="Consolas"/>
-              </a:defRPr>
-            </a:pPr>
-            <a:r>
-              <a:t>// try-with-resources (자동 리소스 정리)</a:t>
-            </a:r>
-          </a:p>
-          <a:p>
-            <a:pPr algn="l">
-              <a:spcAft>
-                <a:spcPts val="100"/>
-              </a:spcAft>
-              <a:defRPr sz="1100">
-                <a:solidFill>
-                  <a:srgbClr val="E2E8F0"/>
-                </a:solidFill>
-                <a:latin typeface="Consolas"/>
-              </a:defRPr>
-            </a:pPr>
-            <a:r>
-              <a:t>try (FileReader fr =</a:t>
-            </a:r>
-          </a:p>
-          <a:p>
-            <a:pPr algn="l">
-              <a:spcAft>
-                <a:spcPts val="100"/>
-              </a:spcAft>
-              <a:defRPr sz="1100">
-                <a:solidFill>
-                  <a:srgbClr val="E2E8F0"/>
-                </a:solidFill>
-                <a:latin typeface="Consolas"/>
-              </a:defRPr>
-            </a:pPr>
-            <a:r>
-              <a:t>        new FileReader("file.txt")) {</a:t>
-            </a:r>
-          </a:p>
-          <a:p>
-            <a:pPr algn="l">
-              <a:spcAft>
-                <a:spcPts val="100"/>
-              </a:spcAft>
-              <a:defRPr sz="1100">
-                <a:solidFill>
-                  <a:srgbClr val="E2E8F0"/>
-                </a:solidFill>
-                <a:latin typeface="Consolas"/>
-              </a:defRPr>
-            </a:pPr>
-            <a:r>
-              <a:t>    // 파일 읽기</a:t>
-            </a:r>
-          </a:p>
-          <a:p>
-            <a:pPr algn="l">
-              <a:spcAft>
-                <a:spcPts val="100"/>
-              </a:spcAft>
-              <a:defRPr sz="1100">
-                <a:solidFill>
-                  <a:srgbClr val="E2E8F0"/>
-                </a:solidFill>
-                <a:latin typeface="Consolas"/>
-              </a:defRPr>
-            </a:pPr>
-            <a:r>
-              <a:t>} catch (IOException e) {</a:t>
-            </a:r>
-          </a:p>
-          <a:p>
-            <a:pPr algn="l">
-              <a:spcAft>
-                <a:spcPts val="100"/>
-              </a:spcAft>
-              <a:defRPr sz="1100">
-                <a:solidFill>
-                  <a:srgbClr val="E2E8F0"/>
-                </a:solidFill>
-                <a:latin typeface="Consolas"/>
-              </a:defRPr>
-            </a:pPr>
-            <a:r>
-              <a:t>    e.printStackTrace();</a:t>
-            </a:r>
-          </a:p>
-          <a:p>
-            <a:pPr algn="l">
-              <a:spcAft>
-                <a:spcPts val="100"/>
-              </a:spcAft>
-              <a:defRPr sz="1100">
-                <a:solidFill>
-                  <a:srgbClr val="E2E8F0"/>
-                </a:solidFill>
-                <a:latin typeface="Consolas"/>
-              </a:defRPr>
-            </a:pPr>
-            <a:r>
-              <a:t>}</a:t>
-            </a:r>
-          </a:p>
-          <a:p>
-            <a:pPr algn="l">
-              <a:spcAft>
-                <a:spcPts val="100"/>
-              </a:spcAft>
-              <a:defRPr sz="1100">
-                <a:solidFill>
-                  <a:srgbClr val="E2E8F0"/>
-                </a:solidFill>
-                <a:latin typeface="Consolas"/>
-              </a:defRPr>
-            </a:pPr>
-            <a:r>
-              <a:t>// fr은 try 종료 시 자동 close()</a:t>
+            <a:r>
+              <a:t>1. try-catch-finally로 비정상 상황 제어</a:t>
+            </a:r>
+          </a:p>
+          <a:p>
+            <a:r>
+              <a:t>2. 사용자 정의 예외로 규칙 위반 표현</a:t>
+            </a:r>
+          </a:p>
+          <a:p>
+            <a:r>
+              <a:t>3. LocalDate.parse()로 날짜 검증</a:t>
+            </a:r>
+          </a:p>
+          <a:p>
+            <a:r>
+              <a:t>4. plusDays(), plusMonths()로 날짜 계산</a:t>
+            </a:r>
+          </a:p>
+          <a:p>
+            <a:r>
+              <a:t>5. ChronoUnit으로 두 날짜 차이 계산</a:t>
             </a:r>
           </a:p>
         </p:txBody>
@@ -4418,99 +3823,13 @@
           </a:bodyPr>
           <a:lstStyle/>
           <a:p>
-            <a:pPr algn="l">
-              <a:spcAft>
-                <a:spcPts val="600"/>
-              </a:spcAft>
-              <a:defRPr sz="1300">
-                <a:solidFill>
-                  <a:srgbClr val="475569"/>
-                </a:solidFill>
-                <a:latin typeface="Calibri"/>
-              </a:defRPr>
-            </a:pPr>
-            <a:r>
-              <a:t>다중 catch:</a:t>
-            </a:r>
-          </a:p>
-          <a:p>
-            <a:pPr algn="l">
-              <a:spcAft>
-                <a:spcPts val="600"/>
-              </a:spcAft>
-              <a:defRPr sz="1300">
-                <a:solidFill>
-                  <a:srgbClr val="475569"/>
-                </a:solidFill>
-                <a:latin typeface="Calibri"/>
-              </a:defRPr>
-            </a:pPr>
-            <a:r>
-              <a:t>여러 예외</a:t>
-            </a:r>
-          </a:p>
-          <a:p>
-            <a:pPr algn="l">
-              <a:spcAft>
-                <a:spcPts val="600"/>
-              </a:spcAft>
-              <a:defRPr sz="1300">
-                <a:solidFill>
-                  <a:srgbClr val="475569"/>
-                </a:solidFill>
-                <a:latin typeface="Calibri"/>
-              </a:defRPr>
-            </a:pPr>
-            <a:r>
-              <a:t>한 번에 처리</a:t>
-            </a:r>
-          </a:p>
-          <a:p>
-            <a:pPr algn="l">
-              <a:spcAft>
-                <a:spcPts val="600"/>
-              </a:spcAft>
-              <a:defRPr sz="1300">
-                <a:solidFill>
-                  <a:srgbClr val="475569"/>
-                </a:solidFill>
-                <a:latin typeface="Calibri"/>
-              </a:defRPr>
-            </a:pPr>
-            <a:r>
-              <a:t>try-with:</a:t>
-            </a:r>
-          </a:p>
-          <a:p>
-            <a:pPr algn="l">
-              <a:spcAft>
-                <a:spcPts val="600"/>
-              </a:spcAft>
-              <a:defRPr sz="1300">
-                <a:solidFill>
-                  <a:srgbClr val="475569"/>
-                </a:solidFill>
-                <a:latin typeface="Calibri"/>
-              </a:defRPr>
-            </a:pPr>
-            <a:r>
-              <a:t>자동 리소스</a:t>
-            </a:r>
-          </a:p>
-          <a:p>
-            <a:pPr algn="l">
-              <a:spcAft>
-                <a:spcPts val="600"/>
-              </a:spcAft>
-              <a:defRPr sz="1300">
-                <a:solidFill>
-                  <a:srgbClr val="475569"/>
-                </a:solidFill>
-                <a:latin typeface="Calibri"/>
-              </a:defRPr>
-            </a:pPr>
-            <a:r>
-              <a:t>정리</a:t>
+            <a:r>
+              <a:t>예외 처리: 복구와 안내</a:t>
+            </a:r>
+          </a:p>
+          <a:p>
+            <a:r>
+              <a:t>표준 API: 안전한 날짜 처리</a:t>
             </a:r>
           </a:p>
         </p:txBody>
@@ -4677,125 +3996,28 @@
           </a:bodyPr>
           <a:lstStyle/>
           <a:p>
-            <a:pPr>
-              <a:spcAft>
-                <a:spcPts val="600"/>
-              </a:spcAft>
-              <a:defRPr sz="1500">
-                <a:solidFill>
-                  <a:srgbClr val="1E293B"/>
-                </a:solidFill>
-                <a:latin typeface="Calibri"/>
-              </a:defRPr>
-            </a:pPr>
-            <a:r>
-              <a:t>1. NumberFormatException 처리</a:t>
-            </a:r>
-          </a:p>
-          <a:p>
-            <a:pPr>
-              <a:spcAft>
-                <a:spcPts val="600"/>
-              </a:spcAft>
-              <a:defRPr sz="1500">
-                <a:solidFill>
-                  <a:srgbClr val="1E293B"/>
-                </a:solidFill>
-                <a:latin typeface="Calibri"/>
-              </a:defRPr>
-            </a:pPr>
-            <a:r>
-              <a:t>   - 문자열을 정수로 변환 시 예외 처리</a:t>
-            </a:r>
-          </a:p>
-          <a:p>
-            <a:pPr>
-              <a:spcAft>
-                <a:spcPts val="600"/>
-              </a:spcAft>
-              <a:defRPr sz="1500">
-                <a:solidFill>
-                  <a:srgbClr val="1E293B"/>
-                </a:solidFill>
-                <a:latin typeface="Calibri"/>
-              </a:defRPr>
-            </a:pPr>
-          </a:p>
-          <a:p>
-            <a:pPr>
-              <a:spcAft>
-                <a:spcPts val="600"/>
-              </a:spcAft>
-              <a:defRPr sz="1500">
-                <a:solidFill>
-                  <a:srgbClr val="1E293B"/>
-                </a:solidFill>
-                <a:latin typeface="Calibri"/>
-              </a:defRPr>
-            </a:pPr>
-            <a:r>
-              <a:t>2. 나이 검증 메서드 구현</a:t>
-            </a:r>
-          </a:p>
-          <a:p>
-            <a:pPr>
-              <a:spcAft>
-                <a:spcPts val="600"/>
-              </a:spcAft>
-              <a:defRPr sz="1500">
-                <a:solidFill>
-                  <a:srgbClr val="1E293B"/>
-                </a:solidFill>
-                <a:latin typeface="Calibri"/>
-              </a:defRPr>
-            </a:pPr>
-            <a:r>
-              <a:t>   - InvalidAgeException 정의하기</a:t>
-            </a:r>
-          </a:p>
-          <a:p>
-            <a:pPr>
-              <a:spcAft>
-                <a:spcPts val="600"/>
-              </a:spcAft>
-              <a:defRPr sz="1500">
-                <a:solidFill>
-                  <a:srgbClr val="1E293B"/>
-                </a:solidFill>
-                <a:latin typeface="Calibri"/>
-              </a:defRPr>
-            </a:pPr>
-          </a:p>
-          <a:p>
-            <a:pPr>
-              <a:spcAft>
-                <a:spcPts val="600"/>
-              </a:spcAft>
-              <a:defRPr sz="1500">
-                <a:solidFill>
-                  <a:srgbClr val="1E293B"/>
-                </a:solidFill>
-                <a:latin typeface="Calibri"/>
-              </a:defRPr>
-            </a:pPr>
-            <a:r>
-              <a:t>3. 날짜 입력받아 유효성 검사</a:t>
-            </a:r>
-          </a:p>
-          <a:p>
-            <a:pPr>
-              <a:spcAft>
-                <a:spcPts val="600"/>
-              </a:spcAft>
-              <a:defRPr sz="1500">
-                <a:solidFill>
-                  <a:srgbClr val="1E293B"/>
-                </a:solidFill>
-                <a:latin typeface="Calibri"/>
-              </a:defRPr>
-            </a:pPr>
-            <a:r>
-              <a:t>   - 윤년 고려</a:t>
+            <a:r>
+              <a:t>1. divide()에서 0 나누기 전에 직접 검사하기</a:t>
+            </a:r>
+          </a:p>
+          <a:p>
+            <a:r>
+              <a:t>2. InvalidScoreException 클래스 만들기</a:t>
+            </a:r>
+          </a:p>
+          <a:p>
+            <a:r>
+              <a:t>3. 날짜 문자열을 yyyy/MM/dd 형식으로 바꿔 보기</a:t>
+            </a:r>
+          </a:p>
+          <a:p>
+            <a:r>
+              <a:t>4. 특정 생일까지 남은 날짜 계산하기</a:t>
+            </a:r>
+          </a:p>
+          <a:p>
+            <a:r>
+              <a:t>5. 시험일까지 남은 일 수 또는 주 수 계산하기</a:t>
             </a:r>
           </a:p>
         </p:txBody>
@@ -4865,35 +4087,13 @@
           </a:bodyPr>
           <a:lstStyle/>
           <a:p>
-            <a:pPr>
-              <a:spcAft>
-                <a:spcPts val="200"/>
-              </a:spcAft>
-              <a:defRPr sz="1200">
-                <a:solidFill>
-                  <a:srgbClr val="E2E8F0"/>
-                </a:solidFill>
-                <a:latin typeface="Consolas"/>
-              </a:defRPr>
-            </a:pPr>
-            <a:r>
-              <a:t>$ javac ExceptionDemo.java</a:t>
-            </a:r>
-          </a:p>
-          <a:p>
-            <a:pPr>
-              <a:spcAft>
-                <a:spcPts val="200"/>
-              </a:spcAft>
-              <a:defRPr sz="1200">
-                <a:solidFill>
-                  <a:srgbClr val="E2E8F0"/>
-                </a:solidFill>
-                <a:latin typeface="Consolas"/>
-              </a:defRPr>
-            </a:pPr>
-            <a:r>
-              <a:t>$ java ExceptionDemo</a:t>
+            <a:r>
+              <a:t>$ javac -d out/classes app/chapter05/*.java</a:t>
+            </a:r>
+          </a:p>
+          <a:p>
+            <a:r>
+              <a:t>$ java -cp out/classes chapter05.ex04</a:t>
             </a:r>
           </a:p>
         </p:txBody>
@@ -5096,67 +4296,33 @@
           </a:bodyPr>
           <a:lstStyle/>
           <a:p>
-            <a:pPr>
-              <a:spcAft>
-                <a:spcPts val="1000"/>
-              </a:spcAft>
-              <a:defRPr sz="1400">
-                <a:solidFill>
-                  <a:srgbClr val="FFFFFF"/>
-                </a:solidFill>
-                <a:latin typeface="Calibri"/>
-              </a:defRPr>
-            </a:pPr>
-            <a:r>
-              <a:t>Q1. `finally` 블록은 언제 실행되는가? 예외가 발생해도 실행되는가?</a:t>
-            </a:r>
-          </a:p>
-          <a:p>
-            <a:pPr>
-              <a:spcAft>
-                <a:spcPts val="1000"/>
-              </a:spcAft>
-              <a:defRPr sz="1400">
-                <a:solidFill>
-                  <a:srgbClr val="FFFFFF"/>
-                </a:solidFill>
-                <a:latin typeface="Calibri"/>
-              </a:defRPr>
-            </a:pPr>
-            <a:r>
-              <a:t>Q2. `throw`와 `catch`의 역할 차이는 무엇인가?</a:t>
-            </a:r>
-          </a:p>
-          <a:p>
-            <a:pPr>
-              <a:spcAft>
-                <a:spcPts val="1000"/>
-              </a:spcAft>
-              <a:defRPr sz="1400">
-                <a:solidFill>
-                  <a:srgbClr val="FFFFFF"/>
-                </a:solidFill>
-                <a:latin typeface="Calibri"/>
-              </a:defRPr>
-            </a:pPr>
-            <a:r>
-              <a:t>Q3. 사용자 정의 예외 클래스를 만드는 이유는 무엇인가?</a:t>
-            </a:r>
-          </a:p>
-          <a:p>
-            <a:pPr>
-              <a:spcAft>
-                <a:spcPts val="1000"/>
-              </a:spcAft>
-              <a:defRPr sz="1400">
-                <a:solidFill>
-                  <a:srgbClr val="FFFFFF"/>
-                </a:solidFill>
-                <a:latin typeface="Calibri"/>
-              </a:defRPr>
-            </a:pPr>
-            <a:r>
-              <a:t>Q4. `"2026-02-30"`이 왜 잘못된 날짜로 처리되는가?</a:t>
+            <a:r>
+              <a:t>Q1. finally는 언제 실행되는가?</a:t>
+            </a:r>
+          </a:p>
+          <a:p>
+            <a:r>
+              <a:t>Q2. throw와 catch의 역할 차이는 무엇인가?</a:t>
+            </a:r>
+          </a:p>
+          <a:p>
+            <a:r>
+              <a:t>Q3. 사용자 정의 예외를 왜 만드는가?</a:t>
+            </a:r>
+          </a:p>
+          <a:p>
+            <a:r>
+              <a:t>Q4. 2026-02-30이 잘못된 날짜인 이유는?</a:t>
+            </a:r>
+          </a:p>
+          <a:p>
+            <a:r>
+              <a:t>Q5. plusDays(10)과 plusMonths(1)은 언제 유용한가?</a:t>
+            </a:r>
+          </a:p>
+          <a:p>
+            <a:r>
+              <a:t>Q6. ChronoUnit.DAYS.between()은 왜 사용하는가?</a:t>
             </a:r>
           </a:p>
         </p:txBody>
@@ -5262,67 +4428,33 @@
           </a:bodyPr>
           <a:lstStyle/>
           <a:p>
-            <a:pPr>
-              <a:spcAft>
-                <a:spcPts val="800"/>
-              </a:spcAft>
-              <a:defRPr sz="1200">
-                <a:solidFill>
-                  <a:srgbClr val="CADCFC"/>
-                </a:solidFill>
-                <a:latin typeface="Calibri"/>
-              </a:defRPr>
-            </a:pPr>
-            <a:r>
-              <a:t>① `divide()`에서 0 나누기 전에 직접 검사하는 방어 코드 작성하기</a:t>
-            </a:r>
-          </a:p>
-          <a:p>
-            <a:pPr>
-              <a:spcAft>
-                <a:spcPts val="800"/>
-              </a:spcAft>
-              <a:defRPr sz="1200">
-                <a:solidFill>
-                  <a:srgbClr val="CADCFC"/>
-                </a:solidFill>
-                <a:latin typeface="Calibri"/>
-              </a:defRPr>
-            </a:pPr>
-            <a:r>
-              <a:t>② `InvalidScoreException` 같은 새 예외 클래스 만들기</a:t>
-            </a:r>
-          </a:p>
-          <a:p>
-            <a:pPr>
-              <a:spcAft>
-                <a:spcPts val="800"/>
-              </a:spcAft>
-              <a:defRPr sz="1200">
-                <a:solidFill>
-                  <a:srgbClr val="CADCFC"/>
-                </a:solidFill>
-                <a:latin typeface="Calibri"/>
-              </a:defRPr>
-            </a:pPr>
-            <a:r>
-              <a:t>③ 날짜 포맷을 `yyyy/MM/dd` 형식으로 바꿔 파싱 시도하기</a:t>
-            </a:r>
-          </a:p>
-          <a:p>
-            <a:pPr>
-              <a:spcAft>
-                <a:spcPts val="800"/>
-              </a:spcAft>
-              <a:defRPr sz="1200">
-                <a:solidFill>
-                  <a:srgbClr val="CADCFC"/>
-                </a:solidFill>
-                <a:latin typeface="Calibri"/>
-              </a:defRPr>
-            </a:pPr>
-            <a:r>
-              <a:t>④ 예외 메시지를 사용자 친화적인 한국어로 바꾸기</a:t>
+            <a:r>
+              <a:t>① divide() 방어 코드 작성하기</a:t>
+            </a:r>
+          </a:p>
+          <a:p>
+            <a:r>
+              <a:t>② InvalidScoreException 추가하기</a:t>
+            </a:r>
+          </a:p>
+          <a:p>
+            <a:r>
+              <a:t>③ yyyy/MM/dd 형식 파싱 시도</a:t>
+            </a:r>
+          </a:p>
+          <a:p>
+            <a:r>
+              <a:t>④ 생일까지 남은 날짜 계산</a:t>
+            </a:r>
+          </a:p>
+          <a:p>
+            <a:r>
+              <a:t>⑤ 시험일까지 남은 주 수 계산</a:t>
+            </a:r>
+          </a:p>
+          <a:p>
+            <a:r>
+              <a:t>⑥ 예외 메시지를 더 친화적으로 바꾸기</a:t>
             </a:r>
           </a:p>
         </p:txBody>
@@ -5446,83 +4578,28 @@
           </a:bodyPr>
           <a:lstStyle/>
           <a:p>
-            <a:pPr>
-              <a:spcAft>
-                <a:spcPts val="1000"/>
-              </a:spcAft>
-              <a:defRPr sz="1600">
-                <a:solidFill>
-                  <a:srgbClr val="CADCFC"/>
-                </a:solidFill>
-                <a:latin typeface="Calibri"/>
-              </a:defRPr>
-            </a:pPr>
-            <a:r>
-              <a:t>• try-catch-finally로 예외 처리</a:t>
-            </a:r>
-          </a:p>
-          <a:p>
-            <a:pPr>
-              <a:spcAft>
-                <a:spcPts val="1000"/>
-              </a:spcAft>
-              <a:defRPr sz="1600">
-                <a:solidFill>
-                  <a:srgbClr val="CADCFC"/>
-                </a:solidFill>
-                <a:latin typeface="Calibri"/>
-              </a:defRPr>
-            </a:pPr>
-            <a:r>
-              <a:t>• Exception 상속으로 커스텀 예외 정의</a:t>
-            </a:r>
-          </a:p>
-          <a:p>
-            <a:pPr>
-              <a:spcAft>
-                <a:spcPts val="1000"/>
-              </a:spcAft>
-              <a:defRPr sz="1600">
-                <a:solidFill>
-                  <a:srgbClr val="CADCFC"/>
-                </a:solidFill>
-                <a:latin typeface="Calibri"/>
-              </a:defRPr>
-            </a:pPr>
+            <a:r>
+              <a:t>• try-catch-finally로 예외 흐름 제어</a:t>
+            </a:r>
+          </a:p>
+          <a:p>
+            <a:r>
+              <a:t>• RuntimeException 상속으로 사용자 정의 예외 작성</a:t>
+            </a:r>
+          </a:p>
+          <a:p>
             <a:r>
               <a:t>• throw로 예외 발생, catch로 처리</a:t>
             </a:r>
           </a:p>
           <a:p>
-            <a:pPr>
-              <a:spcAft>
-                <a:spcPts val="1000"/>
-              </a:spcAft>
-              <a:defRPr sz="1600">
-                <a:solidFill>
-                  <a:srgbClr val="CADCFC"/>
-                </a:solidFill>
-                <a:latin typeface="Calibri"/>
-              </a:defRPr>
-            </a:pPr>
-            <a:r>
-              <a:t>• LocalDate로 현대적 날짜 처리</a:t>
-            </a:r>
-          </a:p>
-          <a:p>
-            <a:pPr>
-              <a:spcAft>
-                <a:spcPts val="1000"/>
-              </a:spcAft>
-              <a:defRPr sz="1600">
-                <a:solidFill>
-                  <a:srgbClr val="CADCFC"/>
-                </a:solidFill>
-                <a:latin typeface="Calibri"/>
-              </a:defRPr>
-            </a:pPr>
-            <a:r>
-              <a:t>• 유효성 검사로 안정적인 프로그램 개발</a:t>
+            <a:r>
+              <a:t>• LocalDate.parse()로 날짜 검증</a:t>
+            </a:r>
+          </a:p>
+          <a:p>
+            <a:r>
+              <a:t>• plusDays, plusMonths, ChronoUnit으로 날짜 계산</a:t>
             </a:r>
           </a:p>
         </p:txBody>
@@ -5689,16 +4766,8 @@
           </a:bodyPr>
           <a:lstStyle/>
           <a:p>
-            <a:pPr algn="l">
-              <a:defRPr sz="1600">
-                <a:solidFill>
-                  <a:srgbClr val="CADCFC"/>
-                </a:solidFill>
-                <a:latin typeface="Calibri"/>
-              </a:defRPr>
-            </a:pPr>
-            <a:r>
-              <a:t>try-catch-finally</a:t>
+            <a:r>
+              <a:t>try-catch-finally, 사용자 정의 예외, 날짜 검증과 계산</a:t>
             </a:r>
           </a:p>
         </p:txBody>
@@ -6056,14 +5125,6 @@
           </a:bodyPr>
           <a:lstStyle/>
           <a:p>
-            <a:pPr>
-              <a:defRPr sz="2200" b="1">
-                <a:solidFill>
-                  <a:srgbClr val="065A82"/>
-                </a:solidFill>
-                <a:latin typeface="Georgia"/>
-              </a:defRPr>
-            </a:pPr>
             <a:r>
               <a:t>예제 1: try-catch-finally</a:t>
             </a:r>
@@ -6135,222 +5196,52 @@
           </a:bodyPr>
           <a:lstStyle/>
           <a:p>
-            <a:pPr algn="l">
-              <a:spcAft>
-                <a:spcPts val="100"/>
-              </a:spcAft>
-              <a:defRPr sz="1100">
-                <a:solidFill>
-                  <a:srgbClr val="E2E8F0"/>
-                </a:solidFill>
-                <a:latin typeface="Consolas"/>
-              </a:defRPr>
-            </a:pPr>
-            <a:r>
-              <a:t>// 기본적인 try-catch</a:t>
-            </a:r>
-          </a:p>
-          <a:p>
-            <a:pPr algn="l">
-              <a:spcAft>
-                <a:spcPts val="100"/>
-              </a:spcAft>
-              <a:defRPr sz="1100">
-                <a:solidFill>
-                  <a:srgbClr val="E2E8F0"/>
-                </a:solidFill>
-                <a:latin typeface="Consolas"/>
-              </a:defRPr>
-            </a:pPr>
+            <a:r>
+              <a:t>static int divide(int a, int b) {</a:t>
+            </a:r>
+          </a:p>
+          <a:p>
+            <a:r>
+              <a:t>    return a / b;</a:t>
+            </a:r>
+          </a:p>
+          <a:p>
+            <a:r>
+              <a:t>}</a:t>
+            </a:r>
+          </a:p>
+          <a:p/>
+          <a:p>
             <a:r>
               <a:t>try {</a:t>
             </a:r>
           </a:p>
           <a:p>
-            <a:pPr algn="l">
-              <a:spcAft>
-                <a:spcPts val="100"/>
-              </a:spcAft>
-              <a:defRPr sz="1100">
-                <a:solidFill>
-                  <a:srgbClr val="E2E8F0"/>
-                </a:solidFill>
-                <a:latin typeface="Consolas"/>
-              </a:defRPr>
-            </a:pPr>
-            <a:r>
-              <a:t>    int result = divide(10, 0);</a:t>
-            </a:r>
-          </a:p>
-          <a:p>
-            <a:pPr algn="l">
-              <a:spcAft>
-                <a:spcPts val="100"/>
-              </a:spcAft>
-              <a:defRPr sz="1100">
-                <a:solidFill>
-                  <a:srgbClr val="E2E8F0"/>
-                </a:solidFill>
-                <a:latin typeface="Consolas"/>
-              </a:defRPr>
-            </a:pPr>
-            <a:r>
-              <a:t>    System.out.println(result);</a:t>
-            </a:r>
-          </a:p>
-          <a:p>
-            <a:pPr algn="l">
-              <a:spcAft>
-                <a:spcPts val="100"/>
-              </a:spcAft>
-              <a:defRPr sz="1100">
-                <a:solidFill>
-                  <a:srgbClr val="E2E8F0"/>
-                </a:solidFill>
-                <a:latin typeface="Consolas"/>
-              </a:defRPr>
-            </a:pPr>
+            <a:r>
+              <a:t>    System.out.println(divide(10, 0));</a:t>
+            </a:r>
+          </a:p>
+          <a:p>
             <a:r>
               <a:t>} catch (ArithmeticException e) {</a:t>
             </a:r>
           </a:p>
           <a:p>
-            <a:pPr algn="l">
-              <a:spcAft>
-                <a:spcPts val="100"/>
-              </a:spcAft>
-              <a:defRPr sz="1100">
-                <a:solidFill>
-                  <a:srgbClr val="E2E8F0"/>
-                </a:solidFill>
-                <a:latin typeface="Consolas"/>
-              </a:defRPr>
-            </a:pPr>
-            <a:r>
-              <a:t>    System.out.println("0으로 나눌 수 없습니다");</a:t>
-            </a:r>
-          </a:p>
-          <a:p>
-            <a:pPr algn="l">
-              <a:spcAft>
-                <a:spcPts val="100"/>
-              </a:spcAft>
-              <a:defRPr sz="1100">
-                <a:solidFill>
-                  <a:srgbClr val="E2E8F0"/>
-                </a:solidFill>
-                <a:latin typeface="Consolas"/>
-              </a:defRPr>
-            </a:pPr>
-            <a:r>
-              <a:t>    e.printStackTrace();</a:t>
-            </a:r>
-          </a:p>
-          <a:p>
-            <a:pPr algn="l">
-              <a:spcAft>
-                <a:spcPts val="100"/>
-              </a:spcAft>
-              <a:defRPr sz="1100">
-                <a:solidFill>
-                  <a:srgbClr val="E2E8F0"/>
-                </a:solidFill>
-                <a:latin typeface="Consolas"/>
-              </a:defRPr>
-            </a:pPr>
+            <a:r>
+              <a:t>    System.out.println("error: " + e.getMessage());</a:t>
+            </a:r>
+          </a:p>
+          <a:p>
             <a:r>
               <a:t>} finally {</a:t>
             </a:r>
           </a:p>
           <a:p>
-            <a:pPr algn="l">
-              <a:spcAft>
-                <a:spcPts val="100"/>
-              </a:spcAft>
-              <a:defRPr sz="1100">
-                <a:solidFill>
-                  <a:srgbClr val="E2E8F0"/>
-                </a:solidFill>
-                <a:latin typeface="Consolas"/>
-              </a:defRPr>
-            </a:pPr>
-            <a:r>
-              <a:t>    System.out.println("항상 실행됨");</a:t>
-            </a:r>
-          </a:p>
-          <a:p>
-            <a:pPr algn="l">
-              <a:spcAft>
-                <a:spcPts val="100"/>
-              </a:spcAft>
-              <a:defRPr sz="1100">
-                <a:solidFill>
-                  <a:srgbClr val="E2E8F0"/>
-                </a:solidFill>
-                <a:latin typeface="Consolas"/>
-              </a:defRPr>
-            </a:pPr>
-            <a:r>
-              <a:t>}</a:t>
-            </a:r>
-          </a:p>
-          <a:p>
-            <a:pPr algn="l">
-              <a:spcAft>
-                <a:spcPts val="100"/>
-              </a:spcAft>
-              <a:defRPr sz="1100">
-                <a:solidFill>
-                  <a:srgbClr val="E2E8F0"/>
-                </a:solidFill>
-                <a:latin typeface="Consolas"/>
-              </a:defRPr>
-            </a:pPr>
-          </a:p>
-          <a:p>
-            <a:pPr algn="l">
-              <a:spcAft>
-                <a:spcPts val="100"/>
-              </a:spcAft>
-              <a:defRPr sz="1100">
-                <a:solidFill>
-                  <a:srgbClr val="E2E8F0"/>
-                </a:solidFill>
-                <a:latin typeface="Consolas"/>
-              </a:defRPr>
-            </a:pPr>
-            <a:r>
-              <a:t>public static int divide(int a, int b) {</a:t>
-            </a:r>
-          </a:p>
-          <a:p>
-            <a:pPr algn="l">
-              <a:spcAft>
-                <a:spcPts val="100"/>
-              </a:spcAft>
-              <a:defRPr sz="1100">
-                <a:solidFill>
-                  <a:srgbClr val="E2E8F0"/>
-                </a:solidFill>
-                <a:latin typeface="Consolas"/>
-              </a:defRPr>
-            </a:pPr>
-            <a:r>
-              <a:t>    return a / b;  // b가 0이면 예외 발생</a:t>
-            </a:r>
-          </a:p>
-          <a:p>
-            <a:pPr algn="l">
-              <a:spcAft>
-                <a:spcPts val="100"/>
-              </a:spcAft>
-              <a:defRPr sz="1100">
-                <a:solidFill>
-                  <a:srgbClr val="E2E8F0"/>
-                </a:solidFill>
-                <a:latin typeface="Consolas"/>
-              </a:defRPr>
-            </a:pPr>
+            <a:r>
+              <a:t>    System.out.println("finally block executed");</a:t>
+            </a:r>
+          </a:p>
+          <a:p>
             <a:r>
               <a:t>}</a:t>
             </a:r>
@@ -6379,83 +5270,18 @@
           </a:bodyPr>
           <a:lstStyle/>
           <a:p>
-            <a:pPr algn="l">
-              <a:spcAft>
-                <a:spcPts val="600"/>
-              </a:spcAft>
-              <a:defRPr sz="1300">
-                <a:solidFill>
-                  <a:srgbClr val="475569"/>
-                </a:solidFill>
-                <a:latin typeface="Calibri"/>
-              </a:defRPr>
-            </a:pPr>
-            <a:r>
-              <a:t>try: 예외 발생</a:t>
-            </a:r>
-          </a:p>
-          <a:p>
-            <a:pPr algn="l">
-              <a:spcAft>
-                <a:spcPts val="600"/>
-              </a:spcAft>
-              <a:defRPr sz="1300">
-                <a:solidFill>
-                  <a:srgbClr val="475569"/>
-                </a:solidFill>
-                <a:latin typeface="Calibri"/>
-              </a:defRPr>
-            </a:pPr>
-            <a:r>
-              <a:t>가능한 코드</a:t>
-            </a:r>
-          </a:p>
-          <a:p>
-            <a:pPr algn="l">
-              <a:spcAft>
-                <a:spcPts val="600"/>
-              </a:spcAft>
-              <a:defRPr sz="1300">
-                <a:solidFill>
-                  <a:srgbClr val="475569"/>
-                </a:solidFill>
-                <a:latin typeface="Calibri"/>
-              </a:defRPr>
-            </a:pPr>
-            <a:r>
-              <a:t>catch: 예외 처리</a:t>
-            </a:r>
-          </a:p>
-          <a:p>
-            <a:pPr algn="l">
-              <a:spcAft>
-                <a:spcPts val="600"/>
-              </a:spcAft>
-              <a:defRPr sz="1300">
-                <a:solidFill>
-                  <a:srgbClr val="475569"/>
-                </a:solidFill>
-                <a:latin typeface="Calibri"/>
-              </a:defRPr>
-            </a:pPr>
-            <a:r>
-              <a:t>finally: 항상</a:t>
-            </a:r>
-          </a:p>
-          <a:p>
-            <a:pPr algn="l">
-              <a:spcAft>
-                <a:spcPts val="600"/>
-              </a:spcAft>
-              <a:defRPr sz="1300">
-                <a:solidFill>
-                  <a:srgbClr val="475569"/>
-                </a:solidFill>
-                <a:latin typeface="Calibri"/>
-              </a:defRPr>
-            </a:pPr>
-            <a:r>
-              <a:t>실행</a:t>
+            <a:r>
+              <a:t>divide(): 0으로 나누면 예외 발생</a:t>
+            </a:r>
+          </a:p>
+          <a:p>
+            <a:r>
+              <a:t>catch: 예외 메시지 출력</a:t>
+            </a:r>
+          </a:p>
+          <a:p>
+            <a:r>
+              <a:t>finally: 예외와 무관하게 항상 실행</a:t>
             </a:r>
           </a:p>
         </p:txBody>
@@ -6622,16 +5448,8 @@
           </a:bodyPr>
           <a:lstStyle/>
           <a:p>
-            <a:pPr algn="l">
-              <a:defRPr sz="1600">
-                <a:solidFill>
-                  <a:srgbClr val="CADCFC"/>
-                </a:solidFill>
-                <a:latin typeface="Calibri"/>
-              </a:defRPr>
-            </a:pPr>
-            <a:r>
-              <a:t>Exception 상속하기</a:t>
+            <a:r>
+              <a:t>RuntimeException 상속하기</a:t>
             </a:r>
           </a:p>
         </p:txBody>
@@ -6762,16 +5580,8 @@
           </a:bodyPr>
           <a:lstStyle/>
           <a:p>
-            <a:pPr>
-              <a:defRPr sz="2200" b="1">
-                <a:solidFill>
-                  <a:srgbClr val="065A82"/>
-                </a:solidFill>
-                <a:latin typeface="Georgia"/>
-              </a:defRPr>
-            </a:pPr>
-            <a:r>
-              <a:t>예제 2: Custom Exception</a:t>
+            <a:r>
+              <a:t>예제 2: 사용자 정의 예외</a:t>
             </a:r>
           </a:p>
         </p:txBody>
@@ -6841,394 +5651,65 @@
           </a:bodyPr>
           <a:lstStyle/>
           <a:p>
-            <a:pPr algn="l">
-              <a:spcAft>
-                <a:spcPts val="100"/>
-              </a:spcAft>
-              <a:defRPr sz="1100">
-                <a:solidFill>
-                  <a:srgbClr val="E2E8F0"/>
-                </a:solidFill>
-                <a:latin typeface="Consolas"/>
-              </a:defRPr>
-            </a:pPr>
-            <a:r>
-              <a:t>// 커스텀 예외 클래스</a:t>
-            </a:r>
-          </a:p>
-          <a:p>
-            <a:pPr algn="l">
-              <a:spcAft>
-                <a:spcPts val="100"/>
-              </a:spcAft>
-              <a:defRPr sz="1100">
-                <a:solidFill>
-                  <a:srgbClr val="E2E8F0"/>
-                </a:solidFill>
-                <a:latin typeface="Consolas"/>
-              </a:defRPr>
-            </a:pPr>
-            <a:r>
-              <a:t>public class InvalidAgeException</a:t>
-            </a:r>
-          </a:p>
-          <a:p>
-            <a:pPr algn="l">
-              <a:spcAft>
-                <a:spcPts val="100"/>
-              </a:spcAft>
-              <a:defRPr sz="1100">
-                <a:solidFill>
-                  <a:srgbClr val="E2E8F0"/>
-                </a:solidFill>
-                <a:latin typeface="Consolas"/>
-              </a:defRPr>
-            </a:pPr>
-            <a:r>
-              <a:t>    extends RuntimeException {</a:t>
-            </a:r>
-          </a:p>
-          <a:p>
-            <a:pPr algn="l">
-              <a:spcAft>
-                <a:spcPts val="100"/>
-              </a:spcAft>
-              <a:defRPr sz="1100">
-                <a:solidFill>
-                  <a:srgbClr val="E2E8F0"/>
-                </a:solidFill>
-                <a:latin typeface="Consolas"/>
-              </a:defRPr>
-            </a:pPr>
-          </a:p>
-          <a:p>
-            <a:pPr algn="l">
-              <a:spcAft>
-                <a:spcPts val="100"/>
-              </a:spcAft>
-              <a:defRPr sz="1100">
-                <a:solidFill>
-                  <a:srgbClr val="E2E8F0"/>
-                </a:solidFill>
-                <a:latin typeface="Consolas"/>
-              </a:defRPr>
-            </a:pPr>
-            <a:r>
-              <a:t>    public InvalidAgeException(String message) {</a:t>
-            </a:r>
-          </a:p>
-          <a:p>
-            <a:pPr algn="l">
-              <a:spcAft>
-                <a:spcPts val="100"/>
-              </a:spcAft>
-              <a:defRPr sz="1100">
-                <a:solidFill>
-                  <a:srgbClr val="E2E8F0"/>
-                </a:solidFill>
-                <a:latin typeface="Consolas"/>
-              </a:defRPr>
-            </a:pPr>
+            <a:r>
+              <a:t>static class InvalidAgeException extends RuntimeException {</a:t>
+            </a:r>
+          </a:p>
+          <a:p>
+            <a:r>
+              <a:t>    InvalidAgeException(String message) {</a:t>
+            </a:r>
+          </a:p>
+          <a:p>
             <a:r>
               <a:t>        super(message);</a:t>
             </a:r>
           </a:p>
           <a:p>
-            <a:pPr algn="l">
-              <a:spcAft>
-                <a:spcPts val="100"/>
-              </a:spcAft>
-              <a:defRPr sz="1100">
-                <a:solidFill>
-                  <a:srgbClr val="E2E8F0"/>
-                </a:solidFill>
-                <a:latin typeface="Consolas"/>
-              </a:defRPr>
-            </a:pPr>
             <a:r>
               <a:t>    }</a:t>
             </a:r>
           </a:p>
           <a:p>
-            <a:pPr algn="l">
-              <a:spcAft>
-                <a:spcPts val="100"/>
-              </a:spcAft>
-              <a:defRPr sz="1100">
-                <a:solidFill>
-                  <a:srgbClr val="E2E8F0"/>
-                </a:solidFill>
-                <a:latin typeface="Consolas"/>
-              </a:defRPr>
-            </a:pPr>
             <a:r>
               <a:t>}</a:t>
             </a:r>
           </a:p>
-          <a:p>
-            <a:pPr algn="l">
-              <a:spcAft>
-                <a:spcPts val="100"/>
-              </a:spcAft>
-              <a:defRPr sz="1100">
-                <a:solidFill>
-                  <a:srgbClr val="E2E8F0"/>
-                </a:solidFill>
-                <a:latin typeface="Consolas"/>
-              </a:defRPr>
-            </a:pPr>
-          </a:p>
-          <a:p>
-            <a:pPr algn="l">
-              <a:spcAft>
-                <a:spcPts val="100"/>
-              </a:spcAft>
-              <a:defRPr sz="1100">
-                <a:solidFill>
-                  <a:srgbClr val="E2E8F0"/>
-                </a:solidFill>
-                <a:latin typeface="Consolas"/>
-              </a:defRPr>
-            </a:pPr>
-            <a:r>
-              <a:t>// 예외 발생 (throw)</a:t>
-            </a:r>
-          </a:p>
-          <a:p>
-            <a:pPr algn="l">
-              <a:spcAft>
-                <a:spcPts val="100"/>
-              </a:spcAft>
-              <a:defRPr sz="1100">
-                <a:solidFill>
-                  <a:srgbClr val="E2E8F0"/>
-                </a:solidFill>
-                <a:latin typeface="Consolas"/>
-              </a:defRPr>
-            </a:pPr>
-            <a:r>
-              <a:t>public void setAge(int age)</a:t>
-            </a:r>
-          </a:p>
-          <a:p>
-            <a:pPr algn="l">
-              <a:spcAft>
-                <a:spcPts val="100"/>
-              </a:spcAft>
-              <a:defRPr sz="1100">
-                <a:solidFill>
-                  <a:srgbClr val="E2E8F0"/>
-                </a:solidFill>
-                <a:latin typeface="Consolas"/>
-              </a:defRPr>
-            </a:pPr>
-            <a:r>
-              <a:t>    throws InvalidAgeException {</a:t>
-            </a:r>
-          </a:p>
-          <a:p>
-            <a:pPr algn="l">
-              <a:spcAft>
-                <a:spcPts val="100"/>
-              </a:spcAft>
-              <a:defRPr sz="1100">
-                <a:solidFill>
-                  <a:srgbClr val="E2E8F0"/>
-                </a:solidFill>
-                <a:latin typeface="Consolas"/>
-              </a:defRPr>
-            </a:pPr>
+          <a:p/>
+          <a:p>
+            <a:r>
+              <a:t>static void checkAge(int age) {</a:t>
+            </a:r>
+          </a:p>
+          <a:p>
             <a:r>
               <a:t>    if (age &lt; 0 || age &gt; 150) {</a:t>
             </a:r>
           </a:p>
           <a:p>
-            <a:pPr algn="l">
-              <a:spcAft>
-                <a:spcPts val="100"/>
-              </a:spcAft>
-              <a:defRPr sz="1100">
-                <a:solidFill>
-                  <a:srgbClr val="E2E8F0"/>
-                </a:solidFill>
-                <a:latin typeface="Consolas"/>
-              </a:defRPr>
-            </a:pPr>
-            <a:r>
-              <a:t>        throw new InvalidAgeException(</a:t>
-            </a:r>
-          </a:p>
-          <a:p>
-            <a:pPr algn="l">
-              <a:spcAft>
-                <a:spcPts val="100"/>
-              </a:spcAft>
-              <a:defRPr sz="1100">
-                <a:solidFill>
-                  <a:srgbClr val="E2E8F0"/>
-                </a:solidFill>
-                <a:latin typeface="Consolas"/>
-              </a:defRPr>
-            </a:pPr>
-            <a:r>
-              <a:t>            "나이는 0~150 사이여야 합니다");</a:t>
-            </a:r>
-          </a:p>
-          <a:p>
-            <a:pPr algn="l">
-              <a:spcAft>
-                <a:spcPts val="100"/>
-              </a:spcAft>
-              <a:defRPr sz="1100">
-                <a:solidFill>
-                  <a:srgbClr val="E2E8F0"/>
-                </a:solidFill>
-                <a:latin typeface="Consolas"/>
-              </a:defRPr>
-            </a:pPr>
+            <a:r>
+              <a:t>        throw new InvalidAgeException("invalid age: " + age);</a:t>
+            </a:r>
+          </a:p>
+          <a:p>
             <a:r>
               <a:t>    }</a:t>
             </a:r>
           </a:p>
           <a:p>
-            <a:pPr algn="l">
-              <a:spcAft>
-                <a:spcPts val="100"/>
-              </a:spcAft>
-              <a:defRPr sz="1100">
-                <a:solidFill>
-                  <a:srgbClr val="E2E8F0"/>
-                </a:solidFill>
-                <a:latin typeface="Consolas"/>
-              </a:defRPr>
-            </a:pPr>
-            <a:r>
-              <a:t>    this.age = age;</a:t>
-            </a:r>
-          </a:p>
-          <a:p>
-            <a:pPr algn="l">
-              <a:spcAft>
-                <a:spcPts val="100"/>
-              </a:spcAft>
-              <a:defRPr sz="1100">
-                <a:solidFill>
-                  <a:srgbClr val="E2E8F0"/>
-                </a:solidFill>
-                <a:latin typeface="Consolas"/>
-              </a:defRPr>
-            </a:pPr>
             <a:r>
               <a:t>}</a:t>
             </a:r>
           </a:p>
-          <a:p>
-            <a:pPr algn="l">
-              <a:spcAft>
-                <a:spcPts val="100"/>
-              </a:spcAft>
-              <a:defRPr sz="1100">
-                <a:solidFill>
-                  <a:srgbClr val="E2E8F0"/>
-                </a:solidFill>
-                <a:latin typeface="Consolas"/>
-              </a:defRPr>
-            </a:pPr>
-          </a:p>
-          <a:p>
-            <a:pPr algn="l">
-              <a:spcAft>
-                <a:spcPts val="100"/>
-              </a:spcAft>
-              <a:defRPr sz="1100">
-                <a:solidFill>
-                  <a:srgbClr val="E2E8F0"/>
-                </a:solidFill>
-                <a:latin typeface="Consolas"/>
-              </a:defRPr>
-            </a:pPr>
-            <a:r>
-              <a:t>// 예외 처리</a:t>
-            </a:r>
-          </a:p>
-          <a:p>
-            <a:pPr algn="l">
-              <a:spcAft>
-                <a:spcPts val="100"/>
-              </a:spcAft>
-              <a:defRPr sz="1100">
-                <a:solidFill>
-                  <a:srgbClr val="E2E8F0"/>
-                </a:solidFill>
-                <a:latin typeface="Consolas"/>
-              </a:defRPr>
-            </a:pPr>
-            <a:r>
-              <a:t>try {</a:t>
-            </a:r>
-          </a:p>
-          <a:p>
-            <a:pPr algn="l">
-              <a:spcAft>
-                <a:spcPts val="100"/>
-              </a:spcAft>
-              <a:defRPr sz="1100">
-                <a:solidFill>
-                  <a:srgbClr val="E2E8F0"/>
-                </a:solidFill>
-                <a:latin typeface="Consolas"/>
-              </a:defRPr>
-            </a:pPr>
-            <a:r>
-              <a:t>    person.setAge(200);</a:t>
-            </a:r>
-          </a:p>
-          <a:p>
-            <a:pPr algn="l">
-              <a:spcAft>
-                <a:spcPts val="100"/>
-              </a:spcAft>
-              <a:defRPr sz="1100">
-                <a:solidFill>
-                  <a:srgbClr val="E2E8F0"/>
-                </a:solidFill>
-                <a:latin typeface="Consolas"/>
-              </a:defRPr>
-            </a:pPr>
-            <a:r>
-              <a:t>} catch (InvalidAgeException e) {</a:t>
-            </a:r>
-          </a:p>
-          <a:p>
-            <a:pPr algn="l">
-              <a:spcAft>
-                <a:spcPts val="100"/>
-              </a:spcAft>
-              <a:defRPr sz="1100">
-                <a:solidFill>
-                  <a:srgbClr val="E2E8F0"/>
-                </a:solidFill>
-                <a:latin typeface="Consolas"/>
-              </a:defRPr>
-            </a:pPr>
-            <a:r>
-              <a:t>    System.out.println(e.getMessage());</a:t>
-            </a:r>
-          </a:p>
-          <a:p>
-            <a:pPr algn="l">
-              <a:spcAft>
-                <a:spcPts val="100"/>
-              </a:spcAft>
-              <a:defRPr sz="1100">
-                <a:solidFill>
-                  <a:srgbClr val="E2E8F0"/>
-                </a:solidFill>
-                <a:latin typeface="Consolas"/>
-              </a:defRPr>
-            </a:pPr>
-            <a:r>
-              <a:t>}</a:t>
+          <a:p/>
+          <a:p>
+            <a:r>
+              <a:t>checkAge(25);   // 정상</a:t>
+            </a:r>
+          </a:p>
+          <a:p>
+            <a:r>
+              <a:t>checkAge(-5);   // 예외 발생</a:t>
             </a:r>
           </a:p>
         </p:txBody>
@@ -7255,51 +5736,18 @@
           </a:bodyPr>
           <a:lstStyle/>
           <a:p>
-            <a:pPr algn="l">
-              <a:spcAft>
-                <a:spcPts val="600"/>
-              </a:spcAft>
-              <a:defRPr sz="1300">
-                <a:solidFill>
-                  <a:srgbClr val="475569"/>
-                </a:solidFill>
-                <a:latin typeface="Calibri"/>
-              </a:defRPr>
-            </a:pPr>
-            <a:r>
-              <a:t>Exception 상속</a:t>
-            </a:r>
-          </a:p>
-          <a:p>
-            <a:pPr algn="l">
-              <a:spcAft>
-                <a:spcPts val="600"/>
-              </a:spcAft>
-              <a:defRPr sz="1300">
-                <a:solidFill>
-                  <a:srgbClr val="475569"/>
-                </a:solidFill>
-                <a:latin typeface="Calibri"/>
-              </a:defRPr>
-            </a:pPr>
-            <a:r>
-              <a:t>새로운 예외 정의</a:t>
-            </a:r>
-          </a:p>
-          <a:p>
-            <a:pPr algn="l">
-              <a:spcAft>
-                <a:spcPts val="600"/>
-              </a:spcAft>
-              <a:defRPr sz="1300">
-                <a:solidFill>
-                  <a:srgbClr val="475569"/>
-                </a:solidFill>
-                <a:latin typeface="Calibri"/>
-              </a:defRPr>
-            </a:pPr>
-            <a:r>
-              <a:t>throw로 발생</a:t>
+            <a:r>
+              <a:t>Exception 상속으로 의미 있는 오류 표현</a:t>
+            </a:r>
+          </a:p>
+          <a:p>
+            <a:r>
+              <a:t>throw로 예외 발생</a:t>
+            </a:r>
+          </a:p>
+          <a:p>
+            <a:r>
+              <a:t>정상 입력과 비정상 입력 모두 테스트</a:t>
             </a:r>
           </a:p>
         </p:txBody>
@@ -7430,16 +5878,8 @@
           </a:bodyPr>
           <a:lstStyle/>
           <a:p>
-            <a:pPr algn="l">
-              <a:defRPr sz="2400" b="1">
-                <a:solidFill>
-                  <a:srgbClr val="065A82"/>
-                </a:solidFill>
-                <a:latin typeface="Georgia"/>
-              </a:defRPr>
-            </a:pPr>
-            <a:r>
-              <a:t>예외 계층 구조</a:t>
+            <a:r>
+              <a:t>throw와 사용자 정의 예외의 의미</a:t>
             </a:r>
           </a:p>
         </p:txBody>
@@ -7466,83 +5906,28 @@
           </a:bodyPr>
           <a:lstStyle/>
           <a:p>
-            <a:pPr algn="l">
-              <a:spcAft>
-                <a:spcPts val="800"/>
-              </a:spcAft>
-              <a:defRPr sz="1600">
-                <a:solidFill>
-                  <a:srgbClr val="1E293B"/>
-                </a:solidFill>
-                <a:latin typeface="Calibri"/>
-              </a:defRPr>
-            </a:pPr>
-            <a:r>
-              <a:t>• Throwable: 모든 예외의 최상위 클래스</a:t>
-            </a:r>
-          </a:p>
-          <a:p>
-            <a:pPr algn="l">
-              <a:spcAft>
-                <a:spcPts val="800"/>
-              </a:spcAft>
-              <a:defRPr sz="1600">
-                <a:solidFill>
-                  <a:srgbClr val="1E293B"/>
-                </a:solidFill>
-                <a:latin typeface="Calibri"/>
-              </a:defRPr>
-            </a:pPr>
-            <a:r>
-              <a:t>  ├─ Error: 시스템 수준 오류 (복구 불가)</a:t>
-            </a:r>
-          </a:p>
-          <a:p>
-            <a:pPr algn="l">
-              <a:spcAft>
-                <a:spcPts val="800"/>
-              </a:spcAft>
-              <a:defRPr sz="1600">
-                <a:solidFill>
-                  <a:srgbClr val="1E293B"/>
-                </a:solidFill>
-                <a:latin typeface="Calibri"/>
-              </a:defRPr>
-            </a:pPr>
-            <a:r>
-              <a:t>  └─ Exception: 프로그래머 수정 가능</a:t>
-            </a:r>
-          </a:p>
-          <a:p>
-            <a:pPr algn="l">
-              <a:spcAft>
-                <a:spcPts val="800"/>
-              </a:spcAft>
-              <a:defRPr sz="1600">
-                <a:solidFill>
-                  <a:srgbClr val="1E293B"/>
-                </a:solidFill>
-                <a:latin typeface="Calibri"/>
-              </a:defRPr>
-            </a:pPr>
-            <a:r>
-              <a:t>     ├─ Checked Exception: IOException, SQLException</a:t>
-            </a:r>
-          </a:p>
-          <a:p>
-            <a:pPr algn="l">
-              <a:spcAft>
-                <a:spcPts val="800"/>
-              </a:spcAft>
-              <a:defRPr sz="1600">
-                <a:solidFill>
-                  <a:srgbClr val="1E293B"/>
-                </a:solidFill>
-                <a:latin typeface="Calibri"/>
-              </a:defRPr>
-            </a:pPr>
-            <a:r>
-              <a:t>     └─ Unchecked Exception: NullPointerException, ArithmeticException</a:t>
+            <a:r>
+              <a:t>• throw는 프로그램이 직접 예외를 발생시키는 문법</a:t>
+            </a:r>
+          </a:p>
+          <a:p>
+            <a:r>
+              <a:t>• catch는 발생한 예외를 받아 처리하는 블록</a:t>
+            </a:r>
+          </a:p>
+          <a:p>
+            <a:r>
+              <a:t>• 사용자 정의 예외는 규칙 위반 상황을 더 명확하게 표현</a:t>
+            </a:r>
+          </a:p>
+          <a:p>
+            <a:r>
+              <a:t>• 예: InvalidAgeException, InvalidScoreException</a:t>
+            </a:r>
+          </a:p>
+          <a:p>
+            <a:r>
+              <a:t>• 단순 오류 메시지보다 프로그램 규칙을 코드로 드러낼 수 있음</a:t>
             </a:r>
           </a:p>
         </p:txBody>
@@ -7709,16 +6094,8 @@
           </a:bodyPr>
           <a:lstStyle/>
           <a:p>
-            <a:pPr algn="l">
-              <a:defRPr sz="1600">
-                <a:solidFill>
-                  <a:srgbClr val="CADCFC"/>
-                </a:solidFill>
-                <a:latin typeface="Calibri"/>
-              </a:defRPr>
-            </a:pPr>
-            <a:r>
-              <a:t>LocalDate, LocalTime, LocalDateTime</a:t>
+            <a:r>
+              <a:t>LocalDate, DateTimeFormatter, ChronoUnit</a:t>
             </a:r>
           </a:p>
         </p:txBody>
@@ -7849,16 +6226,8 @@
           </a:bodyPr>
           <a:lstStyle/>
           <a:p>
-            <a:pPr>
-              <a:defRPr sz="2200" b="1">
-                <a:solidFill>
-                  <a:srgbClr val="065A82"/>
-                </a:solidFill>
-                <a:latin typeface="Georgia"/>
-              </a:defRPr>
-            </a:pPr>
-            <a:r>
-              <a:t>예제 3: LocalDate 사용</a:t>
+            <a:r>
+              <a:t>예제 3: 날짜 파싱과 검증</a:t>
             </a:r>
           </a:p>
         </p:txBody>
@@ -7928,327 +6297,54 @@
           </a:bodyPr>
           <a:lstStyle/>
           <a:p>
-            <a:pPr algn="l">
-              <a:spcAft>
-                <a:spcPts val="100"/>
-              </a:spcAft>
-              <a:defRPr sz="1100">
-                <a:solidFill>
-                  <a:srgbClr val="E2E8F0"/>
-                </a:solidFill>
-                <a:latin typeface="Consolas"/>
-              </a:defRPr>
-            </a:pPr>
-            <a:r>
-              <a:t>import java.time.LocalDate;</a:t>
-            </a:r>
-          </a:p>
-          <a:p>
-            <a:pPr algn="l">
-              <a:spcAft>
-                <a:spcPts val="100"/>
-              </a:spcAft>
-              <a:defRPr sz="1100">
-                <a:solidFill>
-                  <a:srgbClr val="E2E8F0"/>
-                </a:solidFill>
-                <a:latin typeface="Consolas"/>
-              </a:defRPr>
-            </a:pPr>
-            <a:r>
-              <a:t>import java.time.format.DateTimeFormatter;</a:t>
-            </a:r>
-          </a:p>
-          <a:p>
-            <a:pPr algn="l">
-              <a:spcAft>
-                <a:spcPts val="100"/>
-              </a:spcAft>
-              <a:defRPr sz="1100">
-                <a:solidFill>
-                  <a:srgbClr val="E2E8F0"/>
-                </a:solidFill>
-                <a:latin typeface="Consolas"/>
-              </a:defRPr>
-            </a:pPr>
-          </a:p>
-          <a:p>
-            <a:pPr algn="l">
-              <a:spcAft>
-                <a:spcPts val="100"/>
-              </a:spcAft>
-              <a:defRPr sz="1100">
-                <a:solidFill>
-                  <a:srgbClr val="E2E8F0"/>
-                </a:solidFill>
-                <a:latin typeface="Consolas"/>
-              </a:defRPr>
-            </a:pPr>
-            <a:r>
-              <a:t>// LocalDate 생성</a:t>
-            </a:r>
-          </a:p>
-          <a:p>
-            <a:pPr algn="l">
-              <a:spcAft>
-                <a:spcPts val="100"/>
-              </a:spcAft>
-              <a:defRPr sz="1100">
-                <a:solidFill>
-                  <a:srgbClr val="E2E8F0"/>
-                </a:solidFill>
-                <a:latin typeface="Consolas"/>
-              </a:defRPr>
-            </a:pPr>
-            <a:r>
-              <a:t>LocalDate today = LocalDate.now();</a:t>
-            </a:r>
-          </a:p>
-          <a:p>
-            <a:pPr algn="l">
-              <a:spcAft>
-                <a:spcPts val="100"/>
-              </a:spcAft>
-              <a:defRPr sz="1100">
-                <a:solidFill>
-                  <a:srgbClr val="E2E8F0"/>
-                </a:solidFill>
-                <a:latin typeface="Consolas"/>
-              </a:defRPr>
-            </a:pPr>
-            <a:r>
-              <a:t>LocalDate newYear = LocalDate.of(2026, 1, 1);</a:t>
-            </a:r>
-          </a:p>
-          <a:p>
-            <a:pPr algn="l">
-              <a:spcAft>
-                <a:spcPts val="100"/>
-              </a:spcAft>
-              <a:defRPr sz="1100">
-                <a:solidFill>
-                  <a:srgbClr val="E2E8F0"/>
-                </a:solidFill>
-                <a:latin typeface="Consolas"/>
-              </a:defRPr>
-            </a:pPr>
-          </a:p>
-          <a:p>
-            <a:pPr algn="l">
-              <a:spcAft>
-                <a:spcPts val="100"/>
-              </a:spcAft>
-              <a:defRPr sz="1100">
-                <a:solidFill>
-                  <a:srgbClr val="E2E8F0"/>
-                </a:solidFill>
-                <a:latin typeface="Consolas"/>
-              </a:defRPr>
-            </a:pPr>
-            <a:r>
-              <a:t>// 날짜 계산</a:t>
-            </a:r>
-          </a:p>
-          <a:p>
-            <a:pPr algn="l">
-              <a:spcAft>
-                <a:spcPts val="100"/>
-              </a:spcAft>
-              <a:defRPr sz="1100">
-                <a:solidFill>
-                  <a:srgbClr val="E2E8F0"/>
-                </a:solidFill>
-                <a:latin typeface="Consolas"/>
-              </a:defRPr>
-            </a:pPr>
-            <a:r>
-              <a:t>LocalDate nextWeek = today.plusDays(7);</a:t>
-            </a:r>
-          </a:p>
-          <a:p>
-            <a:pPr algn="l">
-              <a:spcAft>
-                <a:spcPts val="100"/>
-              </a:spcAft>
-              <a:defRPr sz="1100">
-                <a:solidFill>
-                  <a:srgbClr val="E2E8F0"/>
-                </a:solidFill>
-                <a:latin typeface="Consolas"/>
-              </a:defRPr>
-            </a:pPr>
-            <a:r>
-              <a:t>LocalDate nextMonth = today.plusMonths(1);</a:t>
-            </a:r>
-          </a:p>
-          <a:p>
-            <a:pPr algn="l">
-              <a:spcAft>
-                <a:spcPts val="100"/>
-              </a:spcAft>
-              <a:defRPr sz="1100">
-                <a:solidFill>
-                  <a:srgbClr val="E2E8F0"/>
-                </a:solidFill>
-                <a:latin typeface="Consolas"/>
-              </a:defRPr>
-            </a:pPr>
-          </a:p>
-          <a:p>
-            <a:pPr algn="l">
-              <a:spcAft>
-                <a:spcPts val="100"/>
-              </a:spcAft>
-              <a:defRPr sz="1100">
-                <a:solidFill>
-                  <a:srgbClr val="E2E8F0"/>
-                </a:solidFill>
-                <a:latin typeface="Consolas"/>
-              </a:defRPr>
-            </a:pPr>
-            <a:r>
-              <a:t>// 날짜 형식 변환</a:t>
-            </a:r>
-          </a:p>
-          <a:p>
-            <a:pPr algn="l">
-              <a:spcAft>
-                <a:spcPts val="100"/>
-              </a:spcAft>
-              <a:defRPr sz="1100">
-                <a:solidFill>
-                  <a:srgbClr val="E2E8F0"/>
-                </a:solidFill>
-                <a:latin typeface="Consolas"/>
-              </a:defRPr>
-            </a:pPr>
-            <a:r>
-              <a:t>DateTimeFormatter formatter =</a:t>
-            </a:r>
-          </a:p>
-          <a:p>
-            <a:pPr algn="l">
-              <a:spcAft>
-                <a:spcPts val="100"/>
-              </a:spcAft>
-              <a:defRPr sz="1100">
-                <a:solidFill>
-                  <a:srgbClr val="E2E8F0"/>
-                </a:solidFill>
-                <a:latin typeface="Consolas"/>
-              </a:defRPr>
-            </a:pPr>
-            <a:r>
-              <a:t>    DateTimeFormatter.ofPattern("yyyy-MM-dd");</a:t>
-            </a:r>
-          </a:p>
-          <a:p>
-            <a:pPr algn="l">
-              <a:spcAft>
-                <a:spcPts val="100"/>
-              </a:spcAft>
-              <a:defRPr sz="1100">
-                <a:solidFill>
-                  <a:srgbClr val="E2E8F0"/>
-                </a:solidFill>
-                <a:latin typeface="Consolas"/>
-              </a:defRPr>
-            </a:pPr>
-            <a:r>
-              <a:t>String dateStr = "2026-03-25";</a:t>
-            </a:r>
-          </a:p>
-          <a:p>
-            <a:pPr algn="l">
-              <a:spcAft>
-                <a:spcPts val="100"/>
-              </a:spcAft>
-              <a:defRPr sz="1100">
-                <a:solidFill>
-                  <a:srgbClr val="E2E8F0"/>
-                </a:solidFill>
-                <a:latin typeface="Consolas"/>
-              </a:defRPr>
-            </a:pPr>
-            <a:r>
-              <a:t>LocalDate parsed = LocalDate.parse(</a:t>
-            </a:r>
-          </a:p>
-          <a:p>
-            <a:pPr algn="l">
-              <a:spcAft>
-                <a:spcPts val="100"/>
-              </a:spcAft>
-              <a:defRPr sz="1100">
-                <a:solidFill>
-                  <a:srgbClr val="E2E8F0"/>
-                </a:solidFill>
-                <a:latin typeface="Consolas"/>
-              </a:defRPr>
-            </a:pPr>
-            <a:r>
-              <a:t>    dateStr, formatter);</a:t>
-            </a:r>
-          </a:p>
-          <a:p>
-            <a:pPr algn="l">
-              <a:spcAft>
-                <a:spcPts val="100"/>
-              </a:spcAft>
-              <a:defRPr sz="1100">
-                <a:solidFill>
-                  <a:srgbClr val="E2E8F0"/>
-                </a:solidFill>
-                <a:latin typeface="Consolas"/>
-              </a:defRPr>
-            </a:pPr>
-          </a:p>
-          <a:p>
-            <a:pPr algn="l">
-              <a:spcAft>
-                <a:spcPts val="100"/>
-              </a:spcAft>
-              <a:defRPr sz="1100">
-                <a:solidFill>
-                  <a:srgbClr val="E2E8F0"/>
-                </a:solidFill>
-                <a:latin typeface="Consolas"/>
-              </a:defRPr>
-            </a:pPr>
-            <a:r>
-              <a:t>System.out.println(today);      // 2026-03-25</a:t>
-            </a:r>
-          </a:p>
-          <a:p>
-            <a:pPr algn="l">
-              <a:spcAft>
-                <a:spcPts val="100"/>
-              </a:spcAft>
-              <a:defRPr sz="1100">
-                <a:solidFill>
-                  <a:srgbClr val="E2E8F0"/>
-                </a:solidFill>
-                <a:latin typeface="Consolas"/>
-              </a:defRPr>
-            </a:pPr>
-            <a:r>
-              <a:t>System.out.println(nextWeek);   // 2026-04-01</a:t>
-            </a:r>
-          </a:p>
-          <a:p>
-            <a:pPr algn="l">
-              <a:spcAft>
-                <a:spcPts val="100"/>
-              </a:spcAft>
-              <a:defRPr sz="1100">
-                <a:solidFill>
-                  <a:srgbClr val="E2E8F0"/>
-                </a:solidFill>
-                <a:latin typeface="Consolas"/>
-              </a:defRPr>
-            </a:pPr>
-            <a:r>
-              <a:t>System.out.println(parsed);     // 2026-03-25</a:t>
+            <a:r>
+              <a:t>static boolean isValidDate(String input) {</a:t>
+            </a:r>
+          </a:p>
+          <a:p>
+            <a:r>
+              <a:t>    try {</a:t>
+            </a:r>
+          </a:p>
+          <a:p>
+            <a:r>
+              <a:t>        LocalDate.parse(input, DateTimeFormatter.ISO_LOCAL_DATE);</a:t>
+            </a:r>
+          </a:p>
+          <a:p>
+            <a:r>
+              <a:t>        return true;</a:t>
+            </a:r>
+          </a:p>
+          <a:p>
+            <a:r>
+              <a:t>    } catch (DateTimeParseException e) {</a:t>
+            </a:r>
+          </a:p>
+          <a:p>
+            <a:r>
+              <a:t>        return false;</a:t>
+            </a:r>
+          </a:p>
+          <a:p>
+            <a:r>
+              <a:t>    }</a:t>
+            </a:r>
+          </a:p>
+          <a:p>
+            <a:r>
+              <a:t>}</a:t>
+            </a:r>
+          </a:p>
+          <a:p/>
+          <a:p>
+            <a:r>
+              <a:t>System.out.println("2026-02-22 valid? " + isValidDate("2026-02-22"));</a:t>
+            </a:r>
+          </a:p>
+          <a:p>
+            <a:r>
+              <a:t>System.out.println("2026-02-30 valid? " + isValidDate("2026-02-30"));</a:t>
             </a:r>
           </a:p>
         </p:txBody>
@@ -8275,67 +6371,18 @@
           </a:bodyPr>
           <a:lstStyle/>
           <a:p>
-            <a:pPr algn="l">
-              <a:spcAft>
-                <a:spcPts val="600"/>
-              </a:spcAft>
-              <a:defRPr sz="1300">
-                <a:solidFill>
-                  <a:srgbClr val="475569"/>
-                </a:solidFill>
-                <a:latin typeface="Calibri"/>
-              </a:defRPr>
-            </a:pPr>
-            <a:r>
-              <a:t>LocalDate.now():</a:t>
-            </a:r>
-          </a:p>
-          <a:p>
-            <a:pPr algn="l">
-              <a:spcAft>
-                <a:spcPts val="600"/>
-              </a:spcAft>
-              <a:defRPr sz="1300">
-                <a:solidFill>
-                  <a:srgbClr val="475569"/>
-                </a:solidFill>
-                <a:latin typeface="Calibri"/>
-              </a:defRPr>
-            </a:pPr>
-            <a:r>
-              <a:t>현재 날짜</a:t>
-            </a:r>
-          </a:p>
-          <a:p>
-            <a:pPr algn="l">
-              <a:spcAft>
-                <a:spcPts val="600"/>
-              </a:spcAft>
-              <a:defRPr sz="1300">
-                <a:solidFill>
-                  <a:srgbClr val="475569"/>
-                </a:solidFill>
-                <a:latin typeface="Calibri"/>
-              </a:defRPr>
-            </a:pPr>
-            <a:r>
-              <a:t>LocalDate.of():</a:t>
-            </a:r>
-          </a:p>
-          <a:p>
-            <a:pPr algn="l">
-              <a:spcAft>
-                <a:spcPts val="600"/>
-              </a:spcAft>
-              <a:defRPr sz="1300">
-                <a:solidFill>
-                  <a:srgbClr val="475569"/>
-                </a:solidFill>
-                <a:latin typeface="Calibri"/>
-              </a:defRPr>
-            </a:pPr>
-            <a:r>
-              <a:t>지정 날짜</a:t>
+            <a:r>
+              <a:t>parse() 성공: true</a:t>
+            </a:r>
+          </a:p>
+          <a:p>
+            <a:r>
+              <a:t>존재하지 않는 날짜면 예외 발생</a:t>
+            </a:r>
+          </a:p>
+          <a:p>
+            <a:r>
+              <a:t>예외를 boolean 검증 결과로 변환</a:t>
             </a:r>
           </a:p>
         </p:txBody>
